--- a/templates/Ferrion-Praesentationsmaster.pptx
+++ b/templates/Ferrion-Praesentationsmaster.pptx
@@ -1872,7 +1872,7 @@
       </p:grpSpPr>
       <p:pic>
         <p:nvPicPr>
-          <p:cNvPr id="2" name="Image 0" descr="C:\stuff\ferrion\scripts\assets\ferrion-logo.png">    </p:cNvPr>
+          <p:cNvPr id="2" name="Image 0" descr="C:\Users\luciv\OneDrive\Dokumente\Privat\Firma\Homrpage\Source\scripts\assets\ferrion-logo.png">    </p:cNvPr>
           <p:cNvPicPr>
             <a:picLocks noChangeAspect="1"/>
           </p:cNvPicPr>
@@ -1887,7 +1887,7 @@
         <p:spPr>
           <a:xfrm>
             <a:off x="548640" y="502920"/>
-            <a:ext cx="2286000" cy="576072"/>
+            <a:ext cx="1078992" cy="576072"/>
           </a:xfrm>
           <a:prstGeom prst="rect">
             <a:avLst/>
@@ -2194,7 +2194,7 @@
       </p:sp>
       <p:pic>
         <p:nvPicPr>
-          <p:cNvPr id="4" name="Image 0" descr="C:\stuff\ferrion\scripts\assets\ferrion-logo.png">    </p:cNvPr>
+          <p:cNvPr id="4" name="Image 0" descr="C:\Users\luciv\OneDrive\Dokumente\Privat\Firma\Homrpage\Source\scripts\assets\ferrion-logo.png">    </p:cNvPr>
           <p:cNvPicPr>
             <a:picLocks noChangeAspect="1"/>
           </p:cNvPicPr>
@@ -2209,7 +2209,7 @@
         <p:spPr>
           <a:xfrm>
             <a:off x="548640" y="4160520"/>
-            <a:ext cx="1920240" cy="484632"/>
+            <a:ext cx="905256" cy="484632"/>
           </a:xfrm>
           <a:prstGeom prst="rect">
             <a:avLst/>
